--- a/Course Plan/PPts/Unit_2_linked_list.pptx
+++ b/Course Plan/PPts/Unit_2_linked_list.pptx
@@ -294,7 +294,7 @@
           <a:p>
             <a:fld id="{2F4A91EB-9D04-4B2B-A8EC-C26057F35368}" type="datetimeFigureOut">
               <a:rPr lang="en-US" smtClean="0"/>
-              <a:t>2/19/2025</a:t>
+              <a:t>3/5/2026</a:t>
             </a:fld>
             <a:endParaRPr lang="en-US"/>
           </a:p>
@@ -2159,7 +2159,7 @@
             <a:fld id="{9334D819-9F07-4261-B09B-9E467E5D9002}" type="datetimeFigureOut">
               <a:rPr lang="en-US" dirty="0"/>
               <a:pPr/>
-              <a:t>2/19/2025</a:t>
+              <a:t>3/5/2026</a:t>
             </a:fld>
             <a:endParaRPr lang="en-US" dirty="0"/>
           </a:p>
@@ -2393,7 +2393,7 @@
           <a:p>
             <a:fld id="{9334D819-9F07-4261-B09B-9E467E5D9002}" type="datetimeFigureOut">
               <a:rPr lang="en-US" dirty="0"/>
-              <a:t>2/19/2025</a:t>
+              <a:t>3/5/2026</a:t>
             </a:fld>
             <a:endParaRPr lang="en-US" dirty="0"/>
           </a:p>
@@ -2568,7 +2568,7 @@
           <a:p>
             <a:fld id="{9334D819-9F07-4261-B09B-9E467E5D9002}" type="datetimeFigureOut">
               <a:rPr lang="en-US" dirty="0"/>
-              <a:t>2/19/2025</a:t>
+              <a:t>3/5/2026</a:t>
             </a:fld>
             <a:endParaRPr lang="en-US" dirty="0"/>
           </a:p>
@@ -3287,7 +3287,7 @@
             <a:fld id="{9334D819-9F07-4261-B09B-9E467E5D9002}" type="datetimeFigureOut">
               <a:rPr lang="en-US" dirty="0"/>
               <a:pPr/>
-              <a:t>2/19/2025</a:t>
+              <a:t>3/5/2026</a:t>
             </a:fld>
             <a:endParaRPr lang="en-US" dirty="0"/>
           </a:p>
@@ -4484,7 +4484,7 @@
           <a:p>
             <a:fld id="{9334D819-9F07-4261-B09B-9E467E5D9002}" type="datetimeFigureOut">
               <a:rPr lang="en-US" dirty="0"/>
-              <a:t>2/19/2025</a:t>
+              <a:t>3/5/2026</a:t>
             </a:fld>
             <a:endParaRPr lang="en-US" dirty="0"/>
           </a:p>
@@ -4869,7 +4869,7 @@
           <a:p>
             <a:fld id="{9334D819-9F07-4261-B09B-9E467E5D9002}" type="datetimeFigureOut">
               <a:rPr lang="en-US" dirty="0"/>
-              <a:t>2/19/2025</a:t>
+              <a:t>3/5/2026</a:t>
             </a:fld>
             <a:endParaRPr lang="en-US" dirty="0"/>
           </a:p>
@@ -4987,7 +4987,7 @@
           <a:p>
             <a:fld id="{9334D819-9F07-4261-B09B-9E467E5D9002}" type="datetimeFigureOut">
               <a:rPr lang="en-US" dirty="0"/>
-              <a:t>2/19/2025</a:t>
+              <a:t>3/5/2026</a:t>
             </a:fld>
             <a:endParaRPr lang="en-US" dirty="0"/>
           </a:p>
@@ -5077,7 +5077,7 @@
           <a:p>
             <a:fld id="{9334D819-9F07-4261-B09B-9E467E5D9002}" type="datetimeFigureOut">
               <a:rPr lang="en-US" dirty="0"/>
-              <a:t>2/19/2025</a:t>
+              <a:t>3/5/2026</a:t>
             </a:fld>
             <a:endParaRPr lang="en-US" dirty="0"/>
           </a:p>
@@ -5835,7 +5835,7 @@
           <a:p>
             <a:fld id="{9334D819-9F07-4261-B09B-9E467E5D9002}" type="datetimeFigureOut">
               <a:rPr lang="en-US" dirty="0"/>
-              <a:t>2/19/2025</a:t>
+              <a:t>3/5/2026</a:t>
             </a:fld>
             <a:endParaRPr lang="en-US" dirty="0"/>
           </a:p>
@@ -6670,7 +6670,7 @@
           <a:p>
             <a:fld id="{9334D819-9F07-4261-B09B-9E467E5D9002}" type="datetimeFigureOut">
               <a:rPr lang="en-US" dirty="0"/>
-              <a:t>2/19/2025</a:t>
+              <a:t>3/5/2026</a:t>
             </a:fld>
             <a:endParaRPr lang="en-US" dirty="0"/>
           </a:p>
@@ -6893,7 +6893,7 @@
             <a:fld id="{9334D819-9F07-4261-B09B-9E467E5D9002}" type="datetimeFigureOut">
               <a:rPr lang="en-US" dirty="0"/>
               <a:pPr/>
-              <a:t>2/19/2025</a:t>
+              <a:t>3/5/2026</a:t>
             </a:fld>
             <a:endParaRPr lang="en-US" dirty="0"/>
           </a:p>
@@ -14287,25 +14287,25 @@
           <p:nvPr>
             <p:extLst>
               <p:ext uri="{D42A27DB-BD31-4B8C-83A1-F6EECF244321}">
-                <p14:modId xmlns:p14="http://schemas.microsoft.com/office/powerpoint/2010/main" val="10034322"/>
+                <p14:modId xmlns:p14="http://schemas.microsoft.com/office/powerpoint/2010/main" val="1170511839"/>
               </p:ext>
             </p:extLst>
           </p:nvPr>
         </p:nvGraphicFramePr>
         <p:xfrm>
-          <a:off x="6043613" y="3001963"/>
-          <a:ext cx="590550" cy="481012"/>
+          <a:off x="6015038" y="2979738"/>
+          <a:ext cx="647700" cy="527050"/>
         </p:xfrm>
         <a:graphic>
           <a:graphicData uri="http://schemas.openxmlformats.org/presentationml/2006/ole">
             <mc:AlternateContent xmlns:mc="http://schemas.openxmlformats.org/markup-compatibility/2006">
               <mc:Choice xmlns:v="urn:schemas-microsoft-com:vml" Requires="v">
-                <p:oleObj spid="_x0000_s1229" name="Packager Shell Object" showAsIcon="1" r:id="rId4" imgW="591120" imgH="481320" progId="Package">
+                <p:oleObj spid="_x0000_s1251" name="Packager Shell Object" showAsIcon="1" r:id="rId4" imgW="647873" imgH="526962" progId="Package">
                   <p:embed/>
                 </p:oleObj>
               </mc:Choice>
               <mc:Fallback>
-                <p:oleObj name="Packager Shell Object" showAsIcon="1" r:id="rId4" imgW="591120" imgH="481320" progId="Package">
+                <p:oleObj name="Packager Shell Object" showAsIcon="1" r:id="rId4" imgW="647873" imgH="526962" progId="Package">
                   <p:embed/>
                   <p:pic>
                     <p:nvPicPr>
@@ -14321,8 +14321,8 @@
                     </p:blipFill>
                     <p:spPr>
                       <a:xfrm>
-                        <a:off x="6043613" y="3001963"/>
-                        <a:ext cx="590550" cy="481012"/>
+                        <a:off x="6015038" y="2979738"/>
+                        <a:ext cx="647700" cy="527050"/>
                       </a:xfrm>
                       <a:prstGeom prst="rect">
                         <a:avLst/>
@@ -19842,25 +19842,25 @@
           <p:nvPr>
             <p:extLst>
               <p:ext uri="{D42A27DB-BD31-4B8C-83A1-F6EECF244321}">
-                <p14:modId xmlns:p14="http://schemas.microsoft.com/office/powerpoint/2010/main" val="751346754"/>
+                <p14:modId xmlns:p14="http://schemas.microsoft.com/office/powerpoint/2010/main" val="1749681128"/>
               </p:ext>
             </p:extLst>
           </p:nvPr>
         </p:nvGraphicFramePr>
         <p:xfrm>
-          <a:off x="5524500" y="1947863"/>
-          <a:ext cx="498475" cy="481012"/>
+          <a:off x="5500688" y="1925638"/>
+          <a:ext cx="546100" cy="527050"/>
         </p:xfrm>
         <a:graphic>
           <a:graphicData uri="http://schemas.openxmlformats.org/presentationml/2006/ole">
             <mc:AlternateContent xmlns:mc="http://schemas.openxmlformats.org/markup-compatibility/2006">
               <mc:Choice xmlns:v="urn:schemas-microsoft-com:vml" Requires="v">
-                <p:oleObj spid="_x0000_s2254" name="Packager Shell Object" showAsIcon="1" r:id="rId3" imgW="498240" imgH="481320" progId="Package">
+                <p:oleObj spid="_x0000_s2275" name="Packager Shell Object" showAsIcon="1" r:id="rId3" imgW="546075" imgH="526962" progId="Package">
                   <p:embed/>
                 </p:oleObj>
               </mc:Choice>
               <mc:Fallback>
-                <p:oleObj name="Packager Shell Object" showAsIcon="1" r:id="rId3" imgW="498240" imgH="481320" progId="Package">
+                <p:oleObj name="Packager Shell Object" showAsIcon="1" r:id="rId3" imgW="546075" imgH="526962" progId="Package">
                   <p:embed/>
                   <p:pic>
                     <p:nvPicPr>
@@ -19876,8 +19876,8 @@
                     </p:blipFill>
                     <p:spPr>
                       <a:xfrm>
-                        <a:off x="5524500" y="1947863"/>
-                        <a:ext cx="498475" cy="481012"/>
+                        <a:off x="5500688" y="1925638"/>
+                        <a:ext cx="546100" cy="527050"/>
                       </a:xfrm>
                       <a:prstGeom prst="rect">
                         <a:avLst/>
@@ -22726,7 +22726,7 @@
           <a:graphicData uri="http://schemas.openxmlformats.org/presentationml/2006/ole">
             <mc:AlternateContent xmlns:mc="http://schemas.openxmlformats.org/markup-compatibility/2006">
               <mc:Choice xmlns:v="urn:schemas-microsoft-com:vml" Requires="v">
-                <p:oleObj spid="_x0000_s27761" name="Equation" r:id="rId3" imgW="914400" imgH="203200" progId="Equation.3">
+                <p:oleObj spid="_x0000_s27782" name="Equation" r:id="rId3" imgW="914400" imgH="203200" progId="Equation.3">
                   <p:embed/>
                 </p:oleObj>
               </mc:Choice>
@@ -22954,7 +22954,7 @@
           <a:graphicData uri="http://schemas.openxmlformats.org/presentationml/2006/ole">
             <mc:AlternateContent xmlns:mc="http://schemas.openxmlformats.org/markup-compatibility/2006">
               <mc:Choice xmlns:v="urn:schemas-microsoft-com:vml" Requires="v">
-                <p:oleObj spid="_x0000_s29007" name="Equation" r:id="rId3" imgW="914400" imgH="203200" progId="Equation.3">
+                <p:oleObj spid="_x0000_s29070" name="Equation" r:id="rId3" imgW="914400" imgH="203200" progId="Equation.3">
                   <p:embed/>
                 </p:oleObj>
               </mc:Choice>
@@ -23024,7 +23024,7 @@
           <a:graphicData uri="http://schemas.openxmlformats.org/presentationml/2006/ole">
             <mc:AlternateContent xmlns:mc="http://schemas.openxmlformats.org/markup-compatibility/2006">
               <mc:Choice xmlns:v="urn:schemas-microsoft-com:vml" Requires="v">
-                <p:oleObj spid="_x0000_s29008" name="Equation" r:id="rId5" imgW="1218671" imgH="203112" progId="Equation.3">
+                <p:oleObj spid="_x0000_s29071" name="Equation" r:id="rId5" imgW="1218671" imgH="203112" progId="Equation.3">
                   <p:embed/>
                 </p:oleObj>
               </mc:Choice>
@@ -23094,7 +23094,7 @@
           <a:graphicData uri="http://schemas.openxmlformats.org/presentationml/2006/ole">
             <mc:AlternateContent xmlns:mc="http://schemas.openxmlformats.org/markup-compatibility/2006">
               <mc:Choice xmlns:v="urn:schemas-microsoft-com:vml" Requires="v">
-                <p:oleObj spid="_x0000_s29009" name="Equation" r:id="rId7" imgW="1524000" imgH="203200" progId="Equation.3">
+                <p:oleObj spid="_x0000_s29072" name="Equation" r:id="rId7" imgW="1524000" imgH="203200" progId="Equation.3">
                   <p:embed/>
                 </p:oleObj>
               </mc:Choice>
@@ -23288,25 +23288,25 @@
           <p:nvPr>
             <p:extLst>
               <p:ext uri="{D42A27DB-BD31-4B8C-83A1-F6EECF244321}">
-                <p14:modId xmlns:p14="http://schemas.microsoft.com/office/powerpoint/2010/main" val="3779508143"/>
+                <p14:modId xmlns:p14="http://schemas.microsoft.com/office/powerpoint/2010/main" val="3917754205"/>
               </p:ext>
             </p:extLst>
           </p:nvPr>
         </p:nvGraphicFramePr>
         <p:xfrm>
-          <a:off x="3273425" y="4016375"/>
-          <a:ext cx="347663" cy="481013"/>
+          <a:off x="3257550" y="3994150"/>
+          <a:ext cx="381000" cy="527050"/>
         </p:xfrm>
         <a:graphic>
           <a:graphicData uri="http://schemas.openxmlformats.org/presentationml/2006/ole">
             <mc:AlternateContent xmlns:mc="http://schemas.openxmlformats.org/markup-compatibility/2006">
               <mc:Choice xmlns:v="urn:schemas-microsoft-com:vml" Requires="v">
-                <p:oleObj spid="_x0000_s30747" name="Packager Shell Object" showAsIcon="1" r:id="rId3" imgW="347760" imgH="481320" progId="Package">
+                <p:oleObj spid="_x0000_s30768" name="Packager Shell Object" showAsIcon="1" r:id="rId3" imgW="381148" imgH="526962" progId="Package">
                   <p:embed/>
                 </p:oleObj>
               </mc:Choice>
               <mc:Fallback>
-                <p:oleObj name="Packager Shell Object" showAsIcon="1" r:id="rId3" imgW="347760" imgH="481320" progId="Package">
+                <p:oleObj name="Packager Shell Object" showAsIcon="1" r:id="rId3" imgW="381148" imgH="526962" progId="Package">
                   <p:embed/>
                   <p:pic>
                     <p:nvPicPr>
@@ -23322,8 +23322,8 @@
                     </p:blipFill>
                     <p:spPr>
                       <a:xfrm>
-                        <a:off x="3273425" y="4016375"/>
-                        <a:ext cx="347663" cy="481013"/>
+                        <a:off x="3257550" y="3994150"/>
+                        <a:ext cx="381000" cy="527050"/>
                       </a:xfrm>
                       <a:prstGeom prst="rect">
                         <a:avLst/>
@@ -23479,7 +23479,7 @@
           <a:graphicData uri="http://schemas.openxmlformats.org/presentationml/2006/ole">
             <mc:AlternateContent xmlns:mc="http://schemas.openxmlformats.org/markup-compatibility/2006">
               <mc:Choice xmlns:v="urn:schemas-microsoft-com:vml" Requires="v">
-                <p:oleObj spid="_x0000_s30031" name="Equation" r:id="rId3" imgW="914400" imgH="203200" progId="Equation.3">
+                <p:oleObj spid="_x0000_s30094" name="Equation" r:id="rId3" imgW="914400" imgH="203200" progId="Equation.3">
                   <p:embed/>
                 </p:oleObj>
               </mc:Choice>
@@ -23549,7 +23549,7 @@
           <a:graphicData uri="http://schemas.openxmlformats.org/presentationml/2006/ole">
             <mc:AlternateContent xmlns:mc="http://schemas.openxmlformats.org/markup-compatibility/2006">
               <mc:Choice xmlns:v="urn:schemas-microsoft-com:vml" Requires="v">
-                <p:oleObj spid="_x0000_s30032" name="Equation" r:id="rId5" imgW="1218671" imgH="203112" progId="Equation.3">
+                <p:oleObj spid="_x0000_s30095" name="Equation" r:id="rId5" imgW="1218671" imgH="203112" progId="Equation.3">
                   <p:embed/>
                 </p:oleObj>
               </mc:Choice>
@@ -23625,7 +23625,7 @@
           <a:graphicData uri="http://schemas.openxmlformats.org/presentationml/2006/ole">
             <mc:AlternateContent xmlns:mc="http://schemas.openxmlformats.org/markup-compatibility/2006">
               <mc:Choice xmlns:v="urn:schemas-microsoft-com:vml" Requires="v">
-                <p:oleObj spid="_x0000_s30033" name="Equation" r:id="rId7" imgW="1587240" imgH="203040" progId="Equation.3">
+                <p:oleObj spid="_x0000_s30096" name="Equation" r:id="rId7" imgW="1587240" imgH="203040" progId="Equation.3">
                   <p:embed/>
                 </p:oleObj>
               </mc:Choice>
@@ -26058,9 +26058,22 @@
           <a:bodyPr/>
           <a:lstStyle/>
           <a:p>
+            <a:endParaRPr lang="en-US" dirty="0" smtClean="0"/>
+          </a:p>
+          <a:p>
             <a:r>
               <a:rPr lang="en-US" dirty="0"/>
-              <a:t>https://dotnettutorials.net/lesson/how-to-merge-two-linked-lists/</a:t>
+              <a:t>https://www.geeksforgeeks.org/dsa/merge-two-sorted-linked-lists/</a:t>
+            </a:r>
+          </a:p>
+          <a:p>
+            <a:r>
+              <a:rPr lang="en-US" dirty="0" smtClean="0"/>
+              <a:t>https</a:t>
+            </a:r>
+            <a:r>
+              <a:rPr lang="en-US" dirty="0"/>
+              <a:t>://dotnettutorials.net/lesson/how-to-merge-two-linked-lists/</a:t>
             </a:r>
           </a:p>
         </p:txBody>
@@ -28876,7 +28889,7 @@
           <a:p>
             <a:r>
               <a:rPr lang="en-US" sz="2400" dirty="0" smtClean="0"/>
-              <a:t>Rest of the lists having fewer elements than the bottom lint.</a:t>
+              <a:t>Rest of the lists having fewer elements than the bottom list.</a:t>
             </a:r>
           </a:p>
           <a:p>
